--- a/courseware/202610_ADS_W08_Recursion.pptx
+++ b/courseware/202610_ADS_W08_Recursion.pptx
@@ -6273,7 +6273,7 @@
                 <a:ea typeface="Microsoft YaHei" pitchFamily="34" charset="-122"/>
                 <a:cs typeface="Microsoft YaHei" pitchFamily="34" charset="-120"/>
               </a:rPr>
-              <a:t>栈深 ≈ 树高</a:t>
+              <a:t>栈深 = 树高 + 1</a:t>
             </a:r>
             <a:endParaRPr lang="en-US" sz="1200" dirty="0"/>
           </a:p>
@@ -6337,7 +6337,7 @@
                 <a:ea typeface="Microsoft YaHei" pitchFamily="34" charset="-122"/>
                 <a:cs typeface="Microsoft YaHei" pitchFamily="34" charset="-120"/>
               </a:rPr>
-              <a:t>；树越高，越容易爆栈（§2）。</a:t>
+              <a:t>（根在第 0 层）；树越高，越容易爆栈（§2）。</a:t>
             </a:r>
             <a:endParaRPr lang="en-US" sz="1100" dirty="0"/>
           </a:p>
@@ -7962,7 +7962,7 @@
                           <a:ea typeface="Microsoft YaHei" pitchFamily="34" charset="-122"/>
                           <a:cs typeface="Microsoft YaHei" pitchFamily="34" charset="-120"/>
                         </a:rPr>
-                        <a:t>n + 1</a:t>
+                        <a:t>n</a:t>
                       </a:r>
                       <a:endParaRPr lang="en-US" sz="1050" dirty="0">
                         <a:latin typeface="Microsoft YaHei" charset="0"/>
@@ -8525,7 +8525,7 @@
                 <a:ea typeface="Microsoft YaHei" pitchFamily="34" charset="-122"/>
                 <a:cs typeface="Microsoft YaHei" pitchFamily="34" charset="-120"/>
               </a:rPr>
-              <a:t>也是 n 个节点的链，但每个节点切片 O(n)——节点数没变，</a:t>
+              <a:t>也是 n + 1 个节点的链，但每个节点切片 O(n)——节点数没变，</a:t>
             </a:r>
             <a:r>
               <a:rPr lang="en-US" sz="1050" b="1" dirty="0">
@@ -11377,7 +11377,7 @@
                 <a:ea typeface="Microsoft YaHei" pitchFamily="34" charset="-122"/>
                 <a:cs typeface="Microsoft YaHei" pitchFamily="34" charset="-120"/>
               </a:rPr>
-              <a:t> 弹一帧。最大栈深 = 最深那条路径的长度，树太高，栈就溢出。</a:t>
+              <a:t> 弹一帧。最大栈深 = 最深那条路径上的节点数，树太高，栈就溢出。</a:t>
             </a:r>
             <a:endParaRPr lang="en-US" sz="1050" dirty="0"/>
           </a:p>
